--- a/documents/IJQHC/regional_anaesthesia_figures_IJQHC_EN.pptx
+++ b/documents/IJQHC/regional_anaesthesia_figures_IJQHC_EN.pptx
@@ -3137,7 +3137,7 @@
         <p:spPr>
           <a:xfrm>
             <a:off x="1645920" y="914400"/>
-            <a:ext cx="8869680" cy="4902318"/>
+            <a:ext cx="8869680" cy="10462158"/>
           </a:xfrm>
           <a:prstGeom prst="rect">
             <a:avLst/>
@@ -3170,7 +3170,7 @@
               <a:rPr sz="1200">
                 <a:latin typeface="Arial"/>
               </a:rPr>
-              <a:t>(A) General anaesthesia (L008). (B) Spinal anaesthesia (L004). Choropleth maps shaded by quintile of the standardised claim ratio (national average = 100). Areas masked by the data provider owing to low volume are shown in grey.</a:t>
+              <a:t>(A) General anaesthesia (L008). (B) Spinal anaesthesia (L004). (C) Epidural anaesthesia as main anaesthetic (L002). (D) Continuous epidural infusion (L003). Choropleth maps shaded by quintile of the standardised claim ratio (national average = 100). Red circles mark secondary medical areas containing at least one university hospital. Areas masked by the data provider owing to low volume are shown in grey.</a:t>
             </a:r>
           </a:p>
         </p:txBody>

--- a/documents/IJQHC/regional_anaesthesia_figures_IJQHC_EN.pptx
+++ b/documents/IJQHC/regional_anaesthesia_figures_IJQHC_EN.pptx
@@ -3219,7 +3219,7 @@
               <a:rPr b="1" sz="2200">
                 <a:latin typeface="Arial"/>
               </a:rPr>
-              <a:t>Figure 2. University hospital presence and the standardised claim ratio for general anaesthesia.</a:t>
+              <a:t>Figure 2. University hospital presence and the combined general-anaesthesia plus continuous-epidural measure.</a:t>
             </a:r>
           </a:p>
         </p:txBody>
@@ -3241,7 +3241,7 @@
         <p:spPr>
           <a:xfrm>
             <a:off x="1645920" y="914400"/>
-            <a:ext cx="8869680" cy="4659974"/>
+            <a:ext cx="8869680" cy="5211686"/>
           </a:xfrm>
           <a:prstGeom prst="rect">
             <a:avLst/>
@@ -3274,7 +3274,7 @@
               <a:rPr sz="1200">
                 <a:latin typeface="Arial"/>
               </a:rPr>
-              <a:t>(A) Distribution of secondary medical areas containing at least one university hospital (n = 64 of 335). (B) Within-prefecture comparison of mean general anaesthesia ratios between university and non-university areas across all 47 prefectures. The university effect is positive in all 47 of 47 prefectures (mean within-prefecture difference +63.3 points, paired t = 13.28, P &lt; 0.001).</a:t>
+              <a:t>(A) Distribution of secondary medical areas containing at least one university hospital (n = 64 of 335; red). (B) Choropleth map of the combined general-anaesthesia plus continuous-epidural standardised claim ratio (mean of L008 and L003 SCR; 331 areas with data for both codes), shaded by quintile. Red circles mark secondary medical areas containing at least one university hospital. Areas masked by the data provider for either code are shown in grey.</a:t>
             </a:r>
           </a:p>
         </p:txBody>
